--- a/docs/защита/Буква за буквой.pptx
+++ b/docs/защита/Буква за буквой.pptx
@@ -2,18 +2,18 @@
 <file path=ppt/presentation.xml><?xml version="1.0" encoding="utf-8"?>
 <p:presentation xmlns:p="http://schemas.openxmlformats.org/presentationml/2006/main">
   <p:sldMasterIdLst>
-    <p:sldMasterId xmlns:r="http://schemas.openxmlformats.org/officeDocument/2006/relationships" id="2147483648" r:id="Rc93172e7625d4a14"/>
+    <p:sldMasterId xmlns:r="http://schemas.openxmlformats.org/officeDocument/2006/relationships" id="2147483648" r:id="Re264c4985b934c0d"/>
   </p:sldMasterIdLst>
   <p:notesMasterIdLst>
-    <p:notesMasterId xmlns:r="http://schemas.openxmlformats.org/officeDocument/2006/relationships" r:id="R4f457a1f04114ad4"/>
+    <p:notesMasterId xmlns:r="http://schemas.openxmlformats.org/officeDocument/2006/relationships" r:id="Rf383fbe92ecc4229"/>
   </p:notesMasterIdLst>
   <p:sldIdLst>
-    <p:sldId xmlns:r="http://schemas.openxmlformats.org/officeDocument/2006/relationships" id="256" r:id="Re7dd7d36336c46c8"/>
-    <p:sldId xmlns:r="http://schemas.openxmlformats.org/officeDocument/2006/relationships" id="257" r:id="Rbc3015c01f9348b7"/>
-    <p:sldId xmlns:r="http://schemas.openxmlformats.org/officeDocument/2006/relationships" id="258" r:id="R43c8e2b957254114"/>
-    <p:sldId xmlns:r="http://schemas.openxmlformats.org/officeDocument/2006/relationships" id="259" r:id="R6e585f0dbe32412e"/>
-    <p:sldId xmlns:r="http://schemas.openxmlformats.org/officeDocument/2006/relationships" id="260" r:id="R49ec98cd71b94c7e"/>
-    <p:sldId xmlns:r="http://schemas.openxmlformats.org/officeDocument/2006/relationships" id="261" r:id="Ra0fbde59602546d9"/>
+    <p:sldId xmlns:r="http://schemas.openxmlformats.org/officeDocument/2006/relationships" id="256" r:id="Ra276d54551ef4a6e"/>
+    <p:sldId xmlns:r="http://schemas.openxmlformats.org/officeDocument/2006/relationships" id="257" r:id="R497dfa2818284454"/>
+    <p:sldId xmlns:r="http://schemas.openxmlformats.org/officeDocument/2006/relationships" id="258" r:id="R1a91cc30afe64b09"/>
+    <p:sldId xmlns:r="http://schemas.openxmlformats.org/officeDocument/2006/relationships" id="259" r:id="R76dcd06b8c694c75"/>
+    <p:sldId xmlns:r="http://schemas.openxmlformats.org/officeDocument/2006/relationships" id="260" r:id="R5960063abed34607"/>
+    <p:sldId xmlns:r="http://schemas.openxmlformats.org/officeDocument/2006/relationships" id="261" r:id="R40c02c1889d642de"/>
   </p:sldIdLst>
   <p:sldSz cx="12192000" cy="6858000"/>
   <p:notesSz cx="6858000" cy="9144000"/>
@@ -847,7 +847,7 @@
           <a:lstStyle xmlns:a="http://schemas.openxmlformats.org/drawingml/2006/main"/>
           <a:p xmlns:a="http://schemas.openxmlformats.org/drawingml/2006/main">
             <a:r>
-              <a:t>3:50–5:00. Реализация использует только собственные HTML, CSS, JavaScript и SVG. Сейчас в игре 80 ответов с авторскими загадками и определениями, более 680 допустимых догадок. Основной словарь лежит в JSON и проходит проверку перед публикацией. Если загрузка данных не удалась, через 1,9 секунды включается запасной набор. Аккаунта, сервера и постоянного прогресса нет. Результат передаём только через существующий мост контейнера. Автономная Android-оболочка помогает установить игру, но на защите нужен запуск в неизменённой официальной песочнице на реальном телефоне. На момент подготовки презентации физические устройства и iOS не проверены. Следующий шаг — пройти этот сценарий на устройстве и проверить учебную гипотезу с детьми.</a:t>
+              <a:t>3:50–5:00. Реализация использует только собственные HTML, CSS, JavaScript и SVG. Сейчас в игре 80 ответов с авторскими загадками и определениями, более 680 допустимых догадок. Основной словарь лежит в JSON и проходит проверку перед публикацией. Если загрузка данных не удалась, через 1,9 секунды включается запасной набор. Аккаунта, сервера и постоянного прогресса нет. Результат передаём только через существующий мост контейнера. Автономные Android- и iOS-оболочки помогают проверить игру. На профиле Duo с iOS 27.1 пройден раунд от СЛОН к ХЛЕБ. На профиле iPhone 16 с iOS 27.0 проверены сохранение буквы при повороте, сброс при закрытии и новом открытии, системное меню отправки текста и предпросмотр PNG через Print Options. Физические телефоны и TestFlight пока не проверены. Для защиты остаётся нужен запуск в неизменённой официальной песочнице на реальном телефоне. Следующий шаг — пройти этот сценарий на устройстве и проверить учебную гипотезу с детьми.</a:t>
             </a:r>
           </a:p>
           <a:p xmlns:a="http://schemas.openxmlformats.org/drawingml/2006/main">
@@ -857,7 +857,7 @@
           </a:p>
           <a:p xmlns:a="http://schemas.openxmlformats.org/drawingml/2006/main">
             <a:r>
-              <a:t>Источники: docs/Архитектура.md, docs/Сборка.md, docs/Контент.md, game/data/words.json, game/js/content.js. Требования поставки: https://kids.hackathon.aam.run/#delivery и https://kids.hackathon.aam.run/#limits. Статус проверок следует уточнить перед выступлением, не подменяя эмулятор физическим телефоном.</a:t>
+              <a:t>Источники: docs/Архитектура.md, docs/Сборка.md, docs/Сборка iOS.md, docs/Проверки.md, docs/Контент.md, game/data/words.json, game/js/content.js. Требования поставки: https://kids.hackathon.aam.run/#delivery и https://kids.hackathon.aam.run/#limits. Simulator не заменяет физический телефон.</a:t>
             </a:r>
           </a:p>
         </p:txBody>
@@ -904,7 +904,7 @@
           <p:cNvPr id="3" name="Title">
             <a:extLst xmlns:a="http://schemas.openxmlformats.org/drawingml/2006/main">
               <a:ext uri="{FF2B5EF4-FFF2-40B4-BE49-F238E27FC236}">
-                <a16:creationId xmlns:a16="http://schemas.microsoft.com/office/drawing/2014/main" id="{575B2D00-A80E-47C9-9913-FDA6EC778491}"/>
+                <a16:creationId xmlns:a16="http://schemas.microsoft.com/office/drawing/2014/main" id="{D67585DF-BDD9-4783-BB33-ACA6806CF489}"/>
               </a:ext>
             </a:extLst>
           </p:cNvPr>
@@ -1133,7 +1133,7 @@
           <p:cNvPr id="2" name="Subtitle">
             <a:extLst xmlns:a="http://schemas.openxmlformats.org/drawingml/2006/main">
               <a:ext uri="{FF2B5EF4-FFF2-40B4-BE49-F238E27FC236}">
-                <a16:creationId xmlns:a16="http://schemas.microsoft.com/office/drawing/2014/main" id="{ED3DEC60-37D3-4B8E-B67C-98DA8B04D6E8}"/>
+                <a16:creationId xmlns:a16="http://schemas.microsoft.com/office/drawing/2014/main" id="{D3F7E3C5-B8E8-4A62-BC92-75D55B97D9B7}"/>
               </a:ext>
             </a:extLst>
           </p:cNvPr>
@@ -1379,7 +1379,7 @@
           <p:cNvPr id="2" name="Section title">
             <a:extLst xmlns:a="http://schemas.openxmlformats.org/drawingml/2006/main">
               <a:ext uri="{FF2B5EF4-FFF2-40B4-BE49-F238E27FC236}">
-                <a16:creationId xmlns:a16="http://schemas.microsoft.com/office/drawing/2014/main" id="{43FEB988-9335-41B6-A360-8DE4AC2F6A91}"/>
+                <a16:creationId xmlns:a16="http://schemas.microsoft.com/office/drawing/2014/main" id="{8A2D3F66-FFE6-4CBB-98EE-7B83DD9FA337}"/>
               </a:ext>
             </a:extLst>
           </p:cNvPr>
@@ -1625,7 +1625,7 @@
           <p:cNvPr id="3" name="Title">
             <a:extLst xmlns:a="http://schemas.openxmlformats.org/drawingml/2006/main">
               <a:ext uri="{FF2B5EF4-FFF2-40B4-BE49-F238E27FC236}">
-                <a16:creationId xmlns:a16="http://schemas.microsoft.com/office/drawing/2014/main" id="{1BDEA020-7E4F-4EC5-A277-258F0E0E692D}"/>
+                <a16:creationId xmlns:a16="http://schemas.microsoft.com/office/drawing/2014/main" id="{D620D959-9524-41A5-80AA-67DD422633A7}"/>
               </a:ext>
             </a:extLst>
           </p:cNvPr>
@@ -1854,7 +1854,7 @@
           <p:cNvPr id="2" name="Body">
             <a:extLst xmlns:a="http://schemas.openxmlformats.org/drawingml/2006/main">
               <a:ext uri="{FF2B5EF4-FFF2-40B4-BE49-F238E27FC236}">
-                <a16:creationId xmlns:a16="http://schemas.microsoft.com/office/drawing/2014/main" id="{C76A702C-3BFA-4BC4-B4CA-B5190D851571}"/>
+                <a16:creationId xmlns:a16="http://schemas.microsoft.com/office/drawing/2014/main" id="{79E41886-6B85-4CC8-983A-7ABF514D8880}"/>
               </a:ext>
             </a:extLst>
           </p:cNvPr>
@@ -2100,7 +2100,7 @@
           <p:cNvPr id="4" name="Title">
             <a:extLst xmlns:a="http://schemas.openxmlformats.org/drawingml/2006/main">
               <a:ext uri="{FF2B5EF4-FFF2-40B4-BE49-F238E27FC236}">
-                <a16:creationId xmlns:a16="http://schemas.microsoft.com/office/drawing/2014/main" id="{D497D227-BC27-40C9-A209-942D32B98BF2}"/>
+                <a16:creationId xmlns:a16="http://schemas.microsoft.com/office/drawing/2014/main" id="{31633742-5576-4C70-A355-05C91A3B9A08}"/>
               </a:ext>
             </a:extLst>
           </p:cNvPr>
@@ -2329,7 +2329,7 @@
           <p:cNvPr id="2" name="Left column">
             <a:extLst xmlns:a="http://schemas.openxmlformats.org/drawingml/2006/main">
               <a:ext uri="{FF2B5EF4-FFF2-40B4-BE49-F238E27FC236}">
-                <a16:creationId xmlns:a16="http://schemas.microsoft.com/office/drawing/2014/main" id="{4C918C9A-6DE7-4F37-872E-C734E8A5110E}"/>
+                <a16:creationId xmlns:a16="http://schemas.microsoft.com/office/drawing/2014/main" id="{D2BDCEC6-E0D5-4D2A-A68A-E073EEC047C2}"/>
               </a:ext>
             </a:extLst>
           </p:cNvPr>
@@ -2558,7 +2558,7 @@
           <p:cNvPr id="3" name="Right column">
             <a:extLst xmlns:a="http://schemas.openxmlformats.org/drawingml/2006/main">
               <a:ext uri="{FF2B5EF4-FFF2-40B4-BE49-F238E27FC236}">
-                <a16:creationId xmlns:a16="http://schemas.microsoft.com/office/drawing/2014/main" id="{45BCC473-1328-4DD2-AC0D-7C2A8EDEA1A8}"/>
+                <a16:creationId xmlns:a16="http://schemas.microsoft.com/office/drawing/2014/main" id="{822DB230-754E-4C9E-84DE-ADDD4FB1EAA0}"/>
               </a:ext>
             </a:extLst>
           </p:cNvPr>
@@ -2804,7 +2804,7 @@
           <p:cNvPr id="3" name="Title">
             <a:extLst xmlns:a="http://schemas.openxmlformats.org/drawingml/2006/main">
               <a:ext uri="{FF2B5EF4-FFF2-40B4-BE49-F238E27FC236}">
-                <a16:creationId xmlns:a16="http://schemas.microsoft.com/office/drawing/2014/main" id="{FD886563-15EA-49E0-BB2C-37694CA458FF}"/>
+                <a16:creationId xmlns:a16="http://schemas.microsoft.com/office/drawing/2014/main" id="{B95A1D6C-2503-4097-95C1-73E3BBBB4BFC}"/>
               </a:ext>
             </a:extLst>
           </p:cNvPr>
@@ -3033,7 +3033,7 @@
           <p:cNvPr id="2" name="Left column">
             <a:extLst xmlns:a="http://schemas.openxmlformats.org/drawingml/2006/main">
               <a:ext uri="{FF2B5EF4-FFF2-40B4-BE49-F238E27FC236}">
-                <a16:creationId xmlns:a16="http://schemas.microsoft.com/office/drawing/2014/main" id="{3CC97D73-CFA4-41CD-90A7-79E47168585B}"/>
+                <a16:creationId xmlns:a16="http://schemas.microsoft.com/office/drawing/2014/main" id="{41BB200B-FF8D-49F8-B6C7-47F1E03F320E}"/>
               </a:ext>
             </a:extLst>
           </p:cNvPr>
@@ -3300,12 +3300,12 @@
   </p:cSld>
   <p:clrMap bg1="lt1" tx1="dk1" bg2="lt2" tx2="dk2" accent1="accent1" accent2="accent2" accent3="accent3" accent4="accent4" accent5="accent5" accent6="accent6" hlink="hlink" folHlink="folHlink"/>
   <p:sldLayoutIdLst>
-    <p:sldLayoutId xmlns:r="http://schemas.openxmlformats.org/officeDocument/2006/relationships" id="2147483649" r:id="Re624f5cb27c347da"/>
-    <p:sldLayoutId xmlns:r="http://schemas.openxmlformats.org/officeDocument/2006/relationships" id="2147483650" r:id="Rd74b1f474b0a41b8"/>
-    <p:sldLayoutId xmlns:r="http://schemas.openxmlformats.org/officeDocument/2006/relationships" id="2147483651" r:id="R68f7418760fc420f"/>
-    <p:sldLayoutId xmlns:r="http://schemas.openxmlformats.org/officeDocument/2006/relationships" id="2147483652" r:id="R310f137d94064d32"/>
-    <p:sldLayoutId xmlns:r="http://schemas.openxmlformats.org/officeDocument/2006/relationships" id="2147483653" r:id="R2676e387782e410f"/>
-    <p:sldLayoutId xmlns:r="http://schemas.openxmlformats.org/officeDocument/2006/relationships" id="2147483654" r:id="Raf7f5e0b8a734ed9"/>
+    <p:sldLayoutId xmlns:r="http://schemas.openxmlformats.org/officeDocument/2006/relationships" id="2147483649" r:id="R9c7fd856f77b441e"/>
+    <p:sldLayoutId xmlns:r="http://schemas.openxmlformats.org/officeDocument/2006/relationships" id="2147483650" r:id="Raa1589d926f843f5"/>
+    <p:sldLayoutId xmlns:r="http://schemas.openxmlformats.org/officeDocument/2006/relationships" id="2147483651" r:id="Rc40642372bed4b14"/>
+    <p:sldLayoutId xmlns:r="http://schemas.openxmlformats.org/officeDocument/2006/relationships" id="2147483652" r:id="Ra49e26e765ed4666"/>
+    <p:sldLayoutId xmlns:r="http://schemas.openxmlformats.org/officeDocument/2006/relationships" id="2147483653" r:id="R712355cce0f249de"/>
+    <p:sldLayoutId xmlns:r="http://schemas.openxmlformats.org/officeDocument/2006/relationships" id="2147483654" r:id="Rec6234ce0545472d"/>
   </p:sldLayoutIdLst>
   <p:txStyles>
     <p:titleStyle>
@@ -3856,7 +3856,7 @@
           <p:cNvPr id="6" name="Событие">
             <a:extLst xmlns:a="http://schemas.openxmlformats.org/drawingml/2006/main">
               <a:ext uri="{FF2B5EF4-FFF2-40B4-BE49-F238E27FC236}">
-                <a16:creationId xmlns:a16="http://schemas.microsoft.com/office/drawing/2014/main" id="{5C3435AF-7DAC-40C7-913D-3452518D2F18}"/>
+                <a16:creationId xmlns:a16="http://schemas.microsoft.com/office/drawing/2014/main" id="{02EA35A5-07CA-4646-B3DE-8AD64183DF5B}"/>
               </a:ext>
             </a:extLst>
           </p:cNvPr>
@@ -4015,7 +4015,7 @@
           <p:cNvPr id="2" name="Название игры">
             <a:extLst xmlns:a="http://schemas.openxmlformats.org/drawingml/2006/main">
               <a:ext uri="{FF2B5EF4-FFF2-40B4-BE49-F238E27FC236}">
-                <a16:creationId xmlns:a16="http://schemas.microsoft.com/office/drawing/2014/main" id="{D344B4A1-D137-491E-A4A6-0CC4CBA70352}"/>
+                <a16:creationId xmlns:a16="http://schemas.microsoft.com/office/drawing/2014/main" id="{954EBB96-1CF0-4A0A-A621-6A2522E418D3}"/>
               </a:ext>
             </a:extLst>
           </p:cNvPr>
@@ -4197,7 +4197,7 @@
           <p:cNvPr id="3" name="Описание">
             <a:extLst xmlns:a="http://schemas.openxmlformats.org/drawingml/2006/main">
               <a:ext uri="{FF2B5EF4-FFF2-40B4-BE49-F238E27FC236}">
-                <a16:creationId xmlns:a16="http://schemas.microsoft.com/office/drawing/2014/main" id="{47572AC3-675C-4266-A04F-E2C31C92DF3B}"/>
+                <a16:creationId xmlns:a16="http://schemas.microsoft.com/office/drawing/2014/main" id="{ECA3A5E4-B7F4-4B26-B0DE-96069B13DDF9}"/>
               </a:ext>
             </a:extLst>
           </p:cNvPr>
@@ -4379,7 +4379,7 @@
           <p:cNvPr id="4" name="Аудитория">
             <a:extLst xmlns:a="http://schemas.openxmlformats.org/drawingml/2006/main">
               <a:ext uri="{FF2B5EF4-FFF2-40B4-BE49-F238E27FC236}">
-                <a16:creationId xmlns:a16="http://schemas.microsoft.com/office/drawing/2014/main" id="{96817B76-CA53-4CAB-8B4A-39AF54CFD7A0}"/>
+                <a16:creationId xmlns:a16="http://schemas.microsoft.com/office/drawing/2014/main" id="{DC8ABF3D-291B-4209-8464-E627CD07BAC3}"/>
               </a:ext>
             </a:extLst>
           </p:cNvPr>
@@ -4561,7 +4561,7 @@
           <p:cNvPr id="5" name="">
             <a:extLst xmlns:a="http://schemas.openxmlformats.org/drawingml/2006/main">
               <a:ext uri="{FF2B5EF4-FFF2-40B4-BE49-F238E27FC236}">
-                <a16:creationId xmlns:a16="http://schemas.microsoft.com/office/drawing/2014/main" id="{860BBCF3-01AA-4B06-A887-3CF095586B2D}"/>
+                <a16:creationId xmlns:a16="http://schemas.microsoft.com/office/drawing/2014/main" id="{14CDD657-ACB2-491A-8A58-259A9F3A08FB}"/>
               </a:ext>
             </a:extLst>
           </p:cNvPr>
@@ -4571,7 +4571,7 @@
           <p:nvPr/>
         </p:nvPicPr>
         <p:blipFill>
-          <a:blip xmlns:r="http://schemas.openxmlformats.org/officeDocument/2006/relationships" xmlns:a="http://schemas.openxmlformats.org/drawingml/2006/main" r:embed="R8e10fafddb334563"/>
+          <a:blip xmlns:r="http://schemas.openxmlformats.org/officeDocument/2006/relationships" xmlns:a="http://schemas.openxmlformats.org/drawingml/2006/main" r:embed="R24cf265eea8d4d86"/>
           <a:stretch xmlns:a="http://schemas.openxmlformats.org/drawingml/2006/main"/>
         </p:blipFill>
         <p:spPr>
@@ -4589,7 +4589,7 @@
     </p:spTree>
     <p:extLst>
       <p:ext uri="{BB962C8B-B14F-4D97-AF65-F5344CB8AC3E}">
-        <p14:creationId xmlns:p14="http://schemas.microsoft.com/office/powerpoint/2010/main" val="175061930"/>
+        <p14:creationId xmlns:p14="http://schemas.microsoft.com/office/powerpoint/2010/main" val="1283168579"/>
       </p:ext>
     </p:extLst>
   </p:cSld>
@@ -4620,7 +4620,7 @@
           <p:cNvPr id="6" name="Заголовок">
             <a:extLst xmlns:a="http://schemas.openxmlformats.org/drawingml/2006/main">
               <a:ext uri="{FF2B5EF4-FFF2-40B4-BE49-F238E27FC236}">
-                <a16:creationId xmlns:a16="http://schemas.microsoft.com/office/drawing/2014/main" id="{D411B46F-3A0D-48AD-824A-01A8073564FE}"/>
+                <a16:creationId xmlns:a16="http://schemas.microsoft.com/office/drawing/2014/main" id="{A9972CCC-BE4D-482B-89A5-FF9D4DD17984}"/>
               </a:ext>
             </a:extLst>
           </p:cNvPr>
@@ -4779,7 +4779,7 @@
           <p:cNvPr id="2" name="Действие ребёнка">
             <a:extLst xmlns:a="http://schemas.openxmlformats.org/drawingml/2006/main">
               <a:ext uri="{FF2B5EF4-FFF2-40B4-BE49-F238E27FC236}">
-                <a16:creationId xmlns:a16="http://schemas.microsoft.com/office/drawing/2014/main" id="{B416D6DC-08EE-4461-AAA5-B0D0E2B2AF14}"/>
+                <a16:creationId xmlns:a16="http://schemas.microsoft.com/office/drawing/2014/main" id="{203A4716-F499-45E5-810B-8F0AD343174E}"/>
               </a:ext>
             </a:extLst>
           </p:cNvPr>
@@ -4984,7 +4984,7 @@
           <p:cNvPr id="3" name="Статус цели">
             <a:extLst xmlns:a="http://schemas.openxmlformats.org/drawingml/2006/main">
               <a:ext uri="{FF2B5EF4-FFF2-40B4-BE49-F238E27FC236}">
-                <a16:creationId xmlns:a16="http://schemas.microsoft.com/office/drawing/2014/main" id="{9125D461-2BDF-4227-9116-6CE971B331B0}"/>
+                <a16:creationId xmlns:a16="http://schemas.microsoft.com/office/drawing/2014/main" id="{1D96A79D-6D9D-4044-A842-D02D0DDD3CDD}"/>
               </a:ext>
             </a:extLst>
           </p:cNvPr>
@@ -5143,7 +5143,7 @@
           <p:cNvPr id="4" name="Наблюдаемые действия">
             <a:extLst xmlns:a="http://schemas.openxmlformats.org/drawingml/2006/main">
               <a:ext uri="{FF2B5EF4-FFF2-40B4-BE49-F238E27FC236}">
-                <a16:creationId xmlns:a16="http://schemas.microsoft.com/office/drawing/2014/main" id="{DC577B92-B1DA-4E1A-B6C3-2649172B01A1}"/>
+                <a16:creationId xmlns:a16="http://schemas.microsoft.com/office/drawing/2014/main" id="{2B9BBDE5-DEBE-4F2F-9A54-3307E9105D82}"/>
               </a:ext>
             </a:extLst>
           </p:cNvPr>
@@ -5330,7 +5330,7 @@
           <p:cNvPr id="5" name="Способ проверки">
             <a:extLst xmlns:a="http://schemas.openxmlformats.org/drawingml/2006/main">
               <a:ext uri="{FF2B5EF4-FFF2-40B4-BE49-F238E27FC236}">
-                <a16:creationId xmlns:a16="http://schemas.microsoft.com/office/drawing/2014/main" id="{EC5847E8-CB47-435D-93CF-64D737B243C5}"/>
+                <a16:creationId xmlns:a16="http://schemas.microsoft.com/office/drawing/2014/main" id="{93BFE656-C4A5-451E-839B-FEC8A8B9AD24}"/>
               </a:ext>
             </a:extLst>
           </p:cNvPr>
@@ -5510,7 +5510,7 @@
     </p:spTree>
     <p:extLst>
       <p:ext uri="{BB962C8B-B14F-4D97-AF65-F5344CB8AC3E}">
-        <p14:creationId xmlns:p14="http://schemas.microsoft.com/office/powerpoint/2010/main" val="2137485661"/>
+        <p14:creationId xmlns:p14="http://schemas.microsoft.com/office/powerpoint/2010/main" val="929221418"/>
       </p:ext>
     </p:extLst>
   </p:cSld>
@@ -5541,7 +5541,7 @@
           <p:cNvPr id="6" name="Заголовок">
             <a:extLst xmlns:a="http://schemas.openxmlformats.org/drawingml/2006/main">
               <a:ext uri="{FF2B5EF4-FFF2-40B4-BE49-F238E27FC236}">
-                <a16:creationId xmlns:a16="http://schemas.microsoft.com/office/drawing/2014/main" id="{24D248D0-27E6-4EC5-AD65-4028D95D7486}"/>
+                <a16:creationId xmlns:a16="http://schemas.microsoft.com/office/drawing/2014/main" id="{76AE5399-E80C-48A3-85A5-38E257DA9B19}"/>
               </a:ext>
             </a:extLst>
           </p:cNvPr>
@@ -5700,7 +5700,7 @@
           <p:cNvPr id="2" name="Размер слова">
             <a:extLst xmlns:a="http://schemas.openxmlformats.org/drawingml/2006/main">
               <a:ext uri="{FF2B5EF4-FFF2-40B4-BE49-F238E27FC236}">
-                <a16:creationId xmlns:a16="http://schemas.microsoft.com/office/drawing/2014/main" id="{124E45EC-AA21-42FE-B853-8C4CD1079289}"/>
+                <a16:creationId xmlns:a16="http://schemas.microsoft.com/office/drawing/2014/main" id="{54F38C21-0452-4338-975C-66CA4923C3E0}"/>
               </a:ext>
             </a:extLst>
           </p:cNvPr>
@@ -5859,7 +5859,7 @@
           <p:cNvPr id="3" name="Правила попыток">
             <a:extLst xmlns:a="http://schemas.openxmlformats.org/drawingml/2006/main">
               <a:ext uri="{FF2B5EF4-FFF2-40B4-BE49-F238E27FC236}">
-                <a16:creationId xmlns:a16="http://schemas.microsoft.com/office/drawing/2014/main" id="{9F58F8E4-EDFC-4C9A-A67F-9F191B70F005}"/>
+                <a16:creationId xmlns:a16="http://schemas.microsoft.com/office/drawing/2014/main" id="{DA6499E0-CD7A-4580-BFBC-D26149C52C10}"/>
               </a:ext>
             </a:extLst>
           </p:cNvPr>
@@ -6041,7 +6041,7 @@
           <p:cNvPr id="4" name="Клавиатура">
             <a:extLst xmlns:a="http://schemas.openxmlformats.org/drawingml/2006/main">
               <a:ext uri="{FF2B5EF4-FFF2-40B4-BE49-F238E27FC236}">
-                <a16:creationId xmlns:a16="http://schemas.microsoft.com/office/drawing/2014/main" id="{0ACCA73F-6729-4A44-861E-EA48BACAF890}"/>
+                <a16:creationId xmlns:a16="http://schemas.microsoft.com/office/drawing/2014/main" id="{55FB1C45-06D4-4373-AB8A-29AB2B9B0755}"/>
               </a:ext>
             </a:extLst>
           </p:cNvPr>
@@ -6223,7 +6223,7 @@
           <p:cNvPr id="5" name="">
             <a:extLst xmlns:a="http://schemas.openxmlformats.org/drawingml/2006/main">
               <a:ext uri="{FF2B5EF4-FFF2-40B4-BE49-F238E27FC236}">
-                <a16:creationId xmlns:a16="http://schemas.microsoft.com/office/drawing/2014/main" id="{57FC3165-77F9-4D92-A64A-43836DCDF4D2}"/>
+                <a16:creationId xmlns:a16="http://schemas.microsoft.com/office/drawing/2014/main" id="{96F9EE0E-D072-4220-A929-5EA81B00B171}"/>
               </a:ext>
             </a:extLst>
           </p:cNvPr>
@@ -6233,7 +6233,7 @@
           <p:nvPr/>
         </p:nvPicPr>
         <p:blipFill>
-          <a:blip xmlns:r="http://schemas.openxmlformats.org/officeDocument/2006/relationships" xmlns:a="http://schemas.openxmlformats.org/drawingml/2006/main" r:embed="R92f282282b364a28"/>
+          <a:blip xmlns:r="http://schemas.openxmlformats.org/officeDocument/2006/relationships" xmlns:a="http://schemas.openxmlformats.org/drawingml/2006/main" r:embed="Rc4d0a27536da4797"/>
           <a:stretch xmlns:a="http://schemas.openxmlformats.org/drawingml/2006/main"/>
         </p:blipFill>
         <p:spPr>
@@ -6251,7 +6251,7 @@
     </p:spTree>
     <p:extLst>
       <p:ext uri="{BB962C8B-B14F-4D97-AF65-F5344CB8AC3E}">
-        <p14:creationId xmlns:p14="http://schemas.microsoft.com/office/powerpoint/2010/main" val="194923773"/>
+        <p14:creationId xmlns:p14="http://schemas.microsoft.com/office/powerpoint/2010/main" val="1933109007"/>
       </p:ext>
     </p:extLst>
   </p:cSld>
@@ -6282,7 +6282,7 @@
           <p:cNvPr id="9" name="Заголовок">
             <a:extLst xmlns:a="http://schemas.openxmlformats.org/drawingml/2006/main">
               <a:ext uri="{FF2B5EF4-FFF2-40B4-BE49-F238E27FC236}">
-                <a16:creationId xmlns:a16="http://schemas.microsoft.com/office/drawing/2014/main" id="{42179AC0-4CE6-4808-A4C3-A1A2F0CC9174}"/>
+                <a16:creationId xmlns:a16="http://schemas.microsoft.com/office/drawing/2014/main" id="{DD696C51-5CEF-4520-BE16-A3D997ACABC3}"/>
               </a:ext>
             </a:extLst>
           </p:cNvPr>
@@ -6441,7 +6441,7 @@
           <p:cNvPr id="2" name="Первая подсказка">
             <a:extLst xmlns:a="http://schemas.openxmlformats.org/drawingml/2006/main">
               <a:ext uri="{FF2B5EF4-FFF2-40B4-BE49-F238E27FC236}">
-                <a16:creationId xmlns:a16="http://schemas.microsoft.com/office/drawing/2014/main" id="{F05A461D-2D8B-4E75-BB69-C89D6DAB2B34}"/>
+                <a16:creationId xmlns:a16="http://schemas.microsoft.com/office/drawing/2014/main" id="{4FC74624-41A7-4356-AE56-0CEFA9CE80C6}"/>
               </a:ext>
             </a:extLst>
           </p:cNvPr>
@@ -6600,7 +6600,7 @@
           <p:cNvPr id="3" name="Смысл первой подсказки">
             <a:extLst xmlns:a="http://schemas.openxmlformats.org/drawingml/2006/main">
               <a:ext uri="{FF2B5EF4-FFF2-40B4-BE49-F238E27FC236}">
-                <a16:creationId xmlns:a16="http://schemas.microsoft.com/office/drawing/2014/main" id="{6A39788A-BE08-46C7-8AF3-C9C20375414E}"/>
+                <a16:creationId xmlns:a16="http://schemas.microsoft.com/office/drawing/2014/main" id="{818779E5-4050-4280-BF62-2676DC44D9AD}"/>
               </a:ext>
             </a:extLst>
           </p:cNvPr>
@@ -6759,7 +6759,7 @@
           <p:cNvPr id="4" name="Вторая подсказка">
             <a:extLst xmlns:a="http://schemas.openxmlformats.org/drawingml/2006/main">
               <a:ext uri="{FF2B5EF4-FFF2-40B4-BE49-F238E27FC236}">
-                <a16:creationId xmlns:a16="http://schemas.microsoft.com/office/drawing/2014/main" id="{87EBBDED-1301-41E8-BB7C-E59AB18EFB4F}"/>
+                <a16:creationId xmlns:a16="http://schemas.microsoft.com/office/drawing/2014/main" id="{F05FCF32-0F9A-4771-AE68-BCA94D6EBD42}"/>
               </a:ext>
             </a:extLst>
           </p:cNvPr>
@@ -6918,7 +6918,7 @@
           <p:cNvPr id="5" name="Смысл второй подсказки">
             <a:extLst xmlns:a="http://schemas.openxmlformats.org/drawingml/2006/main">
               <a:ext uri="{FF2B5EF4-FFF2-40B4-BE49-F238E27FC236}">
-                <a16:creationId xmlns:a16="http://schemas.microsoft.com/office/drawing/2014/main" id="{50DDF192-A838-4072-9FC6-C7D51EC5A319}"/>
+                <a16:creationId xmlns:a16="http://schemas.microsoft.com/office/drawing/2014/main" id="{94CE3729-C89A-4EC6-8716-398D6EFD7FFB}"/>
               </a:ext>
             </a:extLst>
           </p:cNvPr>
@@ -7077,7 +7077,7 @@
           <p:cNvPr id="6" name="Третья подсказка">
             <a:extLst xmlns:a="http://schemas.openxmlformats.org/drawingml/2006/main">
               <a:ext uri="{FF2B5EF4-FFF2-40B4-BE49-F238E27FC236}">
-                <a16:creationId xmlns:a16="http://schemas.microsoft.com/office/drawing/2014/main" id="{918A4E95-49E7-41BC-A89D-F13694B9E3CD}"/>
+                <a16:creationId xmlns:a16="http://schemas.microsoft.com/office/drawing/2014/main" id="{7CFD0659-767A-4C96-903A-FE0137B3D034}"/>
               </a:ext>
             </a:extLst>
           </p:cNvPr>
@@ -7236,7 +7236,7 @@
           <p:cNvPr id="7" name="Смысл третьей подсказки">
             <a:extLst xmlns:a="http://schemas.openxmlformats.org/drawingml/2006/main">
               <a:ext uri="{FF2B5EF4-FFF2-40B4-BE49-F238E27FC236}">
-                <a16:creationId xmlns:a16="http://schemas.microsoft.com/office/drawing/2014/main" id="{B6F77F80-6CCD-44D2-B332-90AA53C4870E}"/>
+                <a16:creationId xmlns:a16="http://schemas.microsoft.com/office/drawing/2014/main" id="{1C30329F-891D-4B91-A4D1-08B741626531}"/>
               </a:ext>
             </a:extLst>
           </p:cNvPr>
@@ -7395,7 +7395,7 @@
           <p:cNvPr id="8" name="">
             <a:extLst xmlns:a="http://schemas.openxmlformats.org/drawingml/2006/main">
               <a:ext uri="{FF2B5EF4-FFF2-40B4-BE49-F238E27FC236}">
-                <a16:creationId xmlns:a16="http://schemas.microsoft.com/office/drawing/2014/main" id="{2D2B804A-4262-4131-B44C-452D4B8D29BE}"/>
+                <a16:creationId xmlns:a16="http://schemas.microsoft.com/office/drawing/2014/main" id="{C06E01F3-2953-4EF0-99FA-3A1553078A9D}"/>
               </a:ext>
             </a:extLst>
           </p:cNvPr>
@@ -7405,7 +7405,7 @@
           <p:nvPr/>
         </p:nvPicPr>
         <p:blipFill>
-          <a:blip xmlns:r="http://schemas.openxmlformats.org/officeDocument/2006/relationships" xmlns:a="http://schemas.openxmlformats.org/drawingml/2006/main" r:embed="Rffb58e4f27bf48bb"/>
+          <a:blip xmlns:r="http://schemas.openxmlformats.org/officeDocument/2006/relationships" xmlns:a="http://schemas.openxmlformats.org/drawingml/2006/main" r:embed="Re0562093dc7b4f3b"/>
           <a:stretch xmlns:a="http://schemas.openxmlformats.org/drawingml/2006/main"/>
         </p:blipFill>
         <p:spPr>
@@ -7423,7 +7423,7 @@
     </p:spTree>
     <p:extLst>
       <p:ext uri="{BB962C8B-B14F-4D97-AF65-F5344CB8AC3E}">
-        <p14:creationId xmlns:p14="http://schemas.microsoft.com/office/powerpoint/2010/main" val="1580911956"/>
+        <p14:creationId xmlns:p14="http://schemas.microsoft.com/office/powerpoint/2010/main" val="128484231"/>
       </p:ext>
     </p:extLst>
   </p:cSld>
@@ -7454,7 +7454,7 @@
           <p:cNvPr id="6" name="Заголовок">
             <a:extLst xmlns:a="http://schemas.openxmlformats.org/drawingml/2006/main">
               <a:ext uri="{FF2B5EF4-FFF2-40B4-BE49-F238E27FC236}">
-                <a16:creationId xmlns:a16="http://schemas.microsoft.com/office/drawing/2014/main" id="{8A365B7B-879C-4259-B2B8-BC96FFA43CF2}"/>
+                <a16:creationId xmlns:a16="http://schemas.microsoft.com/office/drawing/2014/main" id="{09AED3E3-0173-42FC-A6E0-4AFB18AA710A}"/>
               </a:ext>
             </a:extLst>
           </p:cNvPr>
@@ -7636,7 +7636,7 @@
           <p:cNvPr id="2" name="Итог раунда">
             <a:extLst xmlns:a="http://schemas.openxmlformats.org/drawingml/2006/main">
               <a:ext uri="{FF2B5EF4-FFF2-40B4-BE49-F238E27FC236}">
-                <a16:creationId xmlns:a16="http://schemas.microsoft.com/office/drawing/2014/main" id="{613EFEC4-7067-4870-A36E-D47EB997D2C3}"/>
+                <a16:creationId xmlns:a16="http://schemas.microsoft.com/office/drawing/2014/main" id="{D825E527-AC2F-4017-8DEE-01FF93BFF984}"/>
               </a:ext>
             </a:extLst>
           </p:cNvPr>
@@ -7818,7 +7818,7 @@
           <p:cNvPr id="3" name="Передача результата">
             <a:extLst xmlns:a="http://schemas.openxmlformats.org/drawingml/2006/main">
               <a:ext uri="{FF2B5EF4-FFF2-40B4-BE49-F238E27FC236}">
-                <a16:creationId xmlns:a16="http://schemas.microsoft.com/office/drawing/2014/main" id="{B619B6CF-CAEE-41EB-8D49-43B9F79CAAD7}"/>
+                <a16:creationId xmlns:a16="http://schemas.microsoft.com/office/drawing/2014/main" id="{A42FC531-E61F-414D-94FF-6B86B26C1214}"/>
               </a:ext>
             </a:extLst>
           </p:cNvPr>
@@ -8000,7 +8000,7 @@
           <p:cNvPr id="4" name="Граница вывода">
             <a:extLst xmlns:a="http://schemas.openxmlformats.org/drawingml/2006/main">
               <a:ext uri="{FF2B5EF4-FFF2-40B4-BE49-F238E27FC236}">
-                <a16:creationId xmlns:a16="http://schemas.microsoft.com/office/drawing/2014/main" id="{7EC863FA-C3A0-47BC-9D62-BBB2B79E26E4}"/>
+                <a16:creationId xmlns:a16="http://schemas.microsoft.com/office/drawing/2014/main" id="{F575AAAE-DA2C-47FF-8692-1B1D20C09E23}"/>
               </a:ext>
             </a:extLst>
           </p:cNvPr>
@@ -8182,7 +8182,7 @@
           <p:cNvPr id="5" name="">
             <a:extLst xmlns:a="http://schemas.openxmlformats.org/drawingml/2006/main">
               <a:ext uri="{FF2B5EF4-FFF2-40B4-BE49-F238E27FC236}">
-                <a16:creationId xmlns:a16="http://schemas.microsoft.com/office/drawing/2014/main" id="{A0FC8822-B905-4425-A354-FB570E900138}"/>
+                <a16:creationId xmlns:a16="http://schemas.microsoft.com/office/drawing/2014/main" id="{0F7E6256-D55B-4A5C-B2DF-28CD884742CA}"/>
               </a:ext>
             </a:extLst>
           </p:cNvPr>
@@ -8192,7 +8192,7 @@
           <p:nvPr/>
         </p:nvPicPr>
         <p:blipFill>
-          <a:blip xmlns:r="http://schemas.openxmlformats.org/officeDocument/2006/relationships" xmlns:a="http://schemas.openxmlformats.org/drawingml/2006/main" r:embed="R35e1277d07384ada"/>
+          <a:blip xmlns:r="http://schemas.openxmlformats.org/officeDocument/2006/relationships" xmlns:a="http://schemas.openxmlformats.org/drawingml/2006/main" r:embed="R26a821cebec4485e"/>
           <a:stretch xmlns:a="http://schemas.openxmlformats.org/drawingml/2006/main"/>
         </p:blipFill>
         <p:spPr>
@@ -8210,7 +8210,7 @@
     </p:spTree>
     <p:extLst>
       <p:ext uri="{BB962C8B-B14F-4D97-AF65-F5344CB8AC3E}">
-        <p14:creationId xmlns:p14="http://schemas.microsoft.com/office/powerpoint/2010/main" val="359497601"/>
+        <p14:creationId xmlns:p14="http://schemas.microsoft.com/office/powerpoint/2010/main" val="1446599748"/>
       </p:ext>
     </p:extLst>
   </p:cSld>
@@ -8241,7 +8241,7 @@
           <p:cNvPr id="9" name="Заголовок">
             <a:extLst xmlns:a="http://schemas.openxmlformats.org/drawingml/2006/main">
               <a:ext uri="{FF2B5EF4-FFF2-40B4-BE49-F238E27FC236}">
-                <a16:creationId xmlns:a16="http://schemas.microsoft.com/office/drawing/2014/main" id="{AA7E9FA9-8611-4047-AB34-A51539417548}"/>
+                <a16:creationId xmlns:a16="http://schemas.microsoft.com/office/drawing/2014/main" id="{1EABF911-D941-4752-9CC3-35C413E044F2}"/>
               </a:ext>
             </a:extLst>
           </p:cNvPr>
@@ -8400,7 +8400,7 @@
           <p:cNvPr id="2" name="Число ответов">
             <a:extLst xmlns:a="http://schemas.openxmlformats.org/drawingml/2006/main">
               <a:ext uri="{FF2B5EF4-FFF2-40B4-BE49-F238E27FC236}">
-                <a16:creationId xmlns:a16="http://schemas.microsoft.com/office/drawing/2014/main" id="{89A660A8-6113-415D-9EBD-CFA527BC2C00}"/>
+                <a16:creationId xmlns:a16="http://schemas.microsoft.com/office/drawing/2014/main" id="{AF4BA4E5-BE06-436F-9623-7B319DCFAD90}"/>
               </a:ext>
             </a:extLst>
           </p:cNvPr>
@@ -8559,7 +8559,7 @@
           <p:cNvPr id="3" name="Подпись к ответам">
             <a:extLst xmlns:a="http://schemas.openxmlformats.org/drawingml/2006/main">
               <a:ext uri="{FF2B5EF4-FFF2-40B4-BE49-F238E27FC236}">
-                <a16:creationId xmlns:a16="http://schemas.microsoft.com/office/drawing/2014/main" id="{A13B90F3-93B4-437B-AA77-3345CC8AE1BC}"/>
+                <a16:creationId xmlns:a16="http://schemas.microsoft.com/office/drawing/2014/main" id="{2796A971-E20D-4C43-A0DA-608D9A46B86D}"/>
               </a:ext>
             </a:extLst>
           </p:cNvPr>
@@ -8718,7 +8718,7 @@
           <p:cNvPr id="4" name="Число догадок">
             <a:extLst xmlns:a="http://schemas.openxmlformats.org/drawingml/2006/main">
               <a:ext uri="{FF2B5EF4-FFF2-40B4-BE49-F238E27FC236}">
-                <a16:creationId xmlns:a16="http://schemas.microsoft.com/office/drawing/2014/main" id="{2129448B-3B47-48C0-B923-614317CA0D55}"/>
+                <a16:creationId xmlns:a16="http://schemas.microsoft.com/office/drawing/2014/main" id="{C6DBF89B-7561-4900-8A3E-F6CDA377C11C}"/>
               </a:ext>
             </a:extLst>
           </p:cNvPr>
@@ -8877,7 +8877,7 @@
           <p:cNvPr id="5" name="Подпись к догадкам">
             <a:extLst xmlns:a="http://schemas.openxmlformats.org/drawingml/2006/main">
               <a:ext uri="{FF2B5EF4-FFF2-40B4-BE49-F238E27FC236}">
-                <a16:creationId xmlns:a16="http://schemas.microsoft.com/office/drawing/2014/main" id="{B388C7F3-FF8C-427C-9A65-70D3B6BD725F}"/>
+                <a16:creationId xmlns:a16="http://schemas.microsoft.com/office/drawing/2014/main" id="{7C0AF2A9-E548-44B4-9E38-97AF541D0848}"/>
               </a:ext>
             </a:extLst>
           </p:cNvPr>
@@ -9036,7 +9036,7 @@
           <p:cNvPr id="6" name="Технология">
             <a:extLst xmlns:a="http://schemas.openxmlformats.org/drawingml/2006/main">
               <a:ext uri="{FF2B5EF4-FFF2-40B4-BE49-F238E27FC236}">
-                <a16:creationId xmlns:a16="http://schemas.microsoft.com/office/drawing/2014/main" id="{16AD32C3-1B4F-4A6E-8C3E-D02410F14E13}"/>
+                <a16:creationId xmlns:a16="http://schemas.microsoft.com/office/drawing/2014/main" id="{BF3BF116-D9DA-47C8-BB2D-F68BA28CACDF}"/>
               </a:ext>
             </a:extLst>
           </p:cNvPr>
@@ -9243,10 +9243,10 @@
       </p:sp>
       <p:sp>
         <p:nvSpPr>
-          <p:cNvPr id="7" name="Проверка перед защитой">
+          <p:cNvPr id="7" name="Статус проверки">
             <a:extLst xmlns:a="http://schemas.openxmlformats.org/drawingml/2006/main">
               <a:ext uri="{FF2B5EF4-FFF2-40B4-BE49-F238E27FC236}">
-                <a16:creationId xmlns:a16="http://schemas.microsoft.com/office/drawing/2014/main" id="{169D7B66-126C-4D09-BB83-CDABA4B67698}"/>
+                <a16:creationId xmlns:a16="http://schemas.microsoft.com/office/drawing/2014/main" id="{633FC002-CE38-4DE1-B235-7A6F416B8B29}"/>
               </a:ext>
             </a:extLst>
           </p:cNvPr>
@@ -9395,17 +9395,17 @@
                 <a:ea typeface="Arial"/>
                 <a:cs typeface="Arial"/>
               </a:rPr>
-              <a:t>Перед защитой</a:t>
+              <a:t>iOS Simulator: проверено</a:t>
             </a:r>
           </a:p>
         </p:txBody>
       </p:sp>
       <p:sp>
         <p:nvSpPr>
-          <p:cNvPr id="8" name="Следующий шаг">
+          <p:cNvPr id="8" name="Предел проверки">
             <a:extLst xmlns:a="http://schemas.openxmlformats.org/drawingml/2006/main">
               <a:ext uri="{FF2B5EF4-FFF2-40B4-BE49-F238E27FC236}">
-                <a16:creationId xmlns:a16="http://schemas.microsoft.com/office/drawing/2014/main" id="{6C64F8FB-A51B-4DE4-AA4B-B97E78246FE8}"/>
+                <a16:creationId xmlns:a16="http://schemas.microsoft.com/office/drawing/2014/main" id="{8FFAE1E5-93E1-44A9-BC77-6B776529B687}"/>
               </a:ext>
             </a:extLst>
           </p:cNvPr>
@@ -9554,7 +9554,7 @@
                 <a:ea typeface="Arial"/>
                 <a:cs typeface="Arial"/>
               </a:rPr>
-              <a:t>Официальная песочница на телефоне.</a:t>
+              <a:t>Раунд, поворот, сброс и PNG.</a:t>
             </a:r>
           </a:p>
           <a:p xmlns:a="http://schemas.openxmlformats.org/drawingml/2006/main">
@@ -9582,7 +9582,7 @@
                 <a:ea typeface="Arial"/>
                 <a:cs typeface="Arial"/>
               </a:rPr>
-              <a:t>iOS и физические устройства</a:t>
+              <a:t>Физические телефоны и TestFlight</a:t>
             </a:r>
           </a:p>
           <a:p xmlns:a="http://schemas.openxmlformats.org/drawingml/2006/main">
@@ -9613,7 +9613,7 @@
     </p:spTree>
     <p:extLst>
       <p:ext uri="{BB962C8B-B14F-4D97-AF65-F5344CB8AC3E}">
-        <p14:creationId xmlns:p14="http://schemas.microsoft.com/office/powerpoint/2010/main" val="1823717454"/>
+        <p14:creationId xmlns:p14="http://schemas.microsoft.com/office/powerpoint/2010/main" val="1773818991"/>
       </p:ext>
     </p:extLst>
   </p:cSld>
